--- a/catalog/editorial/templates/ed_table_two_columns_3.pptx
+++ b/catalog/editorial/templates/ed_table_two_columns_3.pptx
@@ -3577,7 +3577,7 @@
           <a:noFill/>
         </p:spPr>
         <p:txBody>
-          <a:bodyPr wrap="square" lIns="18288" rIns="18288" tIns="13716" bIns="13716">
+          <a:bodyPr wrap="square" anchor="t" lIns="18288" rIns="18288" tIns="13716" bIns="13716">
             <a:noAutofit/>
           </a:bodyPr>
           <a:lstStyle/>
@@ -3632,7 +3632,7 @@
           <a:noFill/>
         </p:spPr>
         <p:txBody>
-          <a:bodyPr wrap="square" lIns="18288" rIns="18288" tIns="13716" bIns="13716">
+          <a:bodyPr wrap="square" anchor="t" lIns="18288" rIns="18288" tIns="13716" bIns="13716">
             <a:noAutofit/>
           </a:bodyPr>
           <a:lstStyle/>
@@ -3687,7 +3687,7 @@
           <a:noFill/>
         </p:spPr>
         <p:txBody>
-          <a:bodyPr wrap="square" lIns="18288" rIns="18288" tIns="13716" bIns="13716">
+          <a:bodyPr wrap="square" anchor="t" lIns="18288" rIns="18288" tIns="13716" bIns="13716">
             <a:noAutofit/>
           </a:bodyPr>
           <a:lstStyle/>
@@ -3786,7 +3786,7 @@
           <a:noFill/>
         </p:spPr>
         <p:txBody>
-          <a:bodyPr wrap="square" lIns="18288" rIns="18288" tIns="13716" bIns="13716">
+          <a:bodyPr wrap="square" anchor="t" lIns="18288" rIns="18288" tIns="13716" bIns="13716">
             <a:noAutofit/>
           </a:bodyPr>
           <a:lstStyle/>
@@ -3841,7 +3841,7 @@
           <a:noFill/>
         </p:spPr>
         <p:txBody>
-          <a:bodyPr wrap="square" lIns="18288" rIns="18288" tIns="13716" bIns="13716">
+          <a:bodyPr wrap="square" anchor="t" lIns="18288" rIns="18288" tIns="13716" bIns="13716">
             <a:noAutofit/>
           </a:bodyPr>
           <a:lstStyle/>
@@ -3904,7 +3904,7 @@
               <a:tr h="891540">
                 <a:tc>
                   <a:txBody>
-                    <a:bodyPr wrap="square" lIns="18288" rIns="18288" tIns="13716" bIns="13716">
+                    <a:bodyPr wrap="square" anchor="t" lIns="18288" rIns="18288" tIns="13716" bIns="13716">
                       <a:noAutofit/>
                     </a:bodyPr>
                     <a:lstStyle/>
@@ -3941,7 +3941,7 @@
                       </a:r>
                     </a:p>
                   </a:txBody>
-                  <a:tcPr marL="155448" marR="155448" marT="64008" marB="64008">
+                  <a:tcPr marL="155448" marR="155448" marT="64008" marB="64008" anchor="ctr">
                     <a:solidFill>
                       <a:srgbClr val="213547"/>
                     </a:solidFill>
@@ -3949,7 +3949,7 @@
                 </a:tc>
                 <a:tc>
                   <a:txBody>
-                    <a:bodyPr wrap="square" lIns="18288" rIns="18288" tIns="13716" bIns="13716">
+                    <a:bodyPr wrap="square" anchor="t" lIns="18288" rIns="18288" tIns="13716" bIns="13716">
                       <a:noAutofit/>
                     </a:bodyPr>
                     <a:lstStyle/>
@@ -3986,7 +3986,7 @@
                       </a:r>
                     </a:p>
                   </a:txBody>
-                  <a:tcPr marL="155448" marR="155448" marT="64008" marB="64008">
+                  <a:tcPr marL="155448" marR="155448" marT="64008" marB="64008" anchor="ctr">
                     <a:solidFill>
                       <a:srgbClr val="213547"/>
                     </a:solidFill>
@@ -3996,7 +3996,7 @@
               <a:tr h="891540">
                 <a:tc>
                   <a:txBody>
-                    <a:bodyPr wrap="square" lIns="18288" rIns="18288" tIns="13716" bIns="13716">
+                    <a:bodyPr wrap="square" anchor="t" lIns="18288" rIns="18288" tIns="13716" bIns="13716">
                       <a:noAutofit/>
                     </a:bodyPr>
                     <a:lstStyle/>
@@ -4033,7 +4033,7 @@
                       </a:r>
                     </a:p>
                   </a:txBody>
-                  <a:tcPr marL="155448" marR="155448" marT="64008" marB="64008">
+                  <a:tcPr marL="155448" marR="155448" marT="64008" marB="64008" anchor="ctr">
                     <a:solidFill>
                       <a:srgbClr val="FFFFFF"/>
                     </a:solidFill>
@@ -4041,7 +4041,7 @@
                 </a:tc>
                 <a:tc>
                   <a:txBody>
-                    <a:bodyPr wrap="square" lIns="18288" rIns="18288" tIns="13716" bIns="13716">
+                    <a:bodyPr wrap="square" anchor="t" lIns="18288" rIns="18288" tIns="13716" bIns="13716">
                       <a:noAutofit/>
                     </a:bodyPr>
                     <a:lstStyle/>
@@ -4078,7 +4078,7 @@
                       </a:r>
                     </a:p>
                   </a:txBody>
-                  <a:tcPr marL="155448" marR="155448" marT="64008" marB="64008">
+                  <a:tcPr marL="155448" marR="155448" marT="64008" marB="64008" anchor="ctr">
                     <a:solidFill>
                       <a:srgbClr val="FFFFFF"/>
                     </a:solidFill>
@@ -4088,7 +4088,7 @@
               <a:tr h="891540">
                 <a:tc>
                   <a:txBody>
-                    <a:bodyPr wrap="square" lIns="18288" rIns="18288" tIns="13716" bIns="13716">
+                    <a:bodyPr wrap="square" anchor="t" lIns="18288" rIns="18288" tIns="13716" bIns="13716">
                       <a:noAutofit/>
                     </a:bodyPr>
                     <a:lstStyle/>
@@ -4125,7 +4125,7 @@
                       </a:r>
                     </a:p>
                   </a:txBody>
-                  <a:tcPr marL="155448" marR="155448" marT="64008" marB="64008">
+                  <a:tcPr marL="155448" marR="155448" marT="64008" marB="64008" anchor="ctr">
                     <a:solidFill>
                       <a:srgbClr val="EDF1F4"/>
                     </a:solidFill>
@@ -4133,7 +4133,7 @@
                 </a:tc>
                 <a:tc>
                   <a:txBody>
-                    <a:bodyPr wrap="square" lIns="18288" rIns="18288" tIns="13716" bIns="13716">
+                    <a:bodyPr wrap="square" anchor="t" lIns="18288" rIns="18288" tIns="13716" bIns="13716">
                       <a:noAutofit/>
                     </a:bodyPr>
                     <a:lstStyle/>
@@ -4170,7 +4170,7 @@
                       </a:r>
                     </a:p>
                   </a:txBody>
-                  <a:tcPr marL="155448" marR="155448" marT="64008" marB="64008">
+                  <a:tcPr marL="155448" marR="155448" marT="64008" marB="64008" anchor="ctr">
                     <a:solidFill>
                       <a:srgbClr val="EDF1F4"/>
                     </a:solidFill>
@@ -4180,7 +4180,7 @@
               <a:tr h="891540">
                 <a:tc>
                   <a:txBody>
-                    <a:bodyPr wrap="square" lIns="18288" rIns="18288" tIns="13716" bIns="13716">
+                    <a:bodyPr wrap="square" anchor="t" lIns="18288" rIns="18288" tIns="13716" bIns="13716">
                       <a:noAutofit/>
                     </a:bodyPr>
                     <a:lstStyle/>
@@ -4217,7 +4217,7 @@
                       </a:r>
                     </a:p>
                   </a:txBody>
-                  <a:tcPr marL="155448" marR="155448" marT="64008" marB="64008">
+                  <a:tcPr marL="155448" marR="155448" marT="64008" marB="64008" anchor="ctr">
                     <a:solidFill>
                       <a:srgbClr val="FFFFFF"/>
                     </a:solidFill>
@@ -4225,7 +4225,7 @@
                 </a:tc>
                 <a:tc>
                   <a:txBody>
-                    <a:bodyPr wrap="square" lIns="18288" rIns="18288" tIns="13716" bIns="13716">
+                    <a:bodyPr wrap="square" anchor="t" lIns="18288" rIns="18288" tIns="13716" bIns="13716">
                       <a:noAutofit/>
                     </a:bodyPr>
                     <a:lstStyle/>
@@ -4262,7 +4262,7 @@
                       </a:r>
                     </a:p>
                   </a:txBody>
-                  <a:tcPr marL="155448" marR="155448" marT="64008" marB="64008">
+                  <a:tcPr marL="155448" marR="155448" marT="64008" marB="64008" anchor="ctr">
                     <a:solidFill>
                       <a:srgbClr val="FFFFFF"/>
                     </a:solidFill>
@@ -4290,7 +4290,7 @@
           <a:noFill/>
         </p:spPr>
         <p:txBody>
-          <a:bodyPr wrap="square" lIns="18288" rIns="18288" tIns="13716" bIns="13716">
+          <a:bodyPr wrap="square" anchor="t" lIns="18288" rIns="18288" tIns="13716" bIns="13716">
             <a:noAutofit/>
           </a:bodyPr>
           <a:lstStyle/>
